--- a/ppt/out/WLC2급_제11강_상실·애도와관계회복코칭.pptx
+++ b/ppt/out/WLC2급_제11강_상실·애도와관계회복코칭.pptx
@@ -157,7 +157,7 @@
   <p:extLst>
     <p:ext uri="{521415D9-36F7-43E2-AB2F-B90AF26B5E84}">
       <p14:sectionLst xmlns:p14="http://schemas.microsoft.com/office/powerpoint/2010/main">
-        <p14:section name="열기" id="{689e4bfb-1eea-d99f-f9b9-42ff41beac65}">
+        <p14:section name="열기" id="{056902d6-9b36-044e-7a65-7d3c64e7f243}">
           <p14:sldIdLst>
             <p14:sldId id="256"/>
             <p14:sldId id="257"/>
@@ -169,7 +169,7 @@
             <p14:sldId id="263"/>
           </p14:sldIdLst>
         </p14:section>
-        <p14:section name="1교시 애도를 이해하는 지도" id="{5fc730ed-5cc4-c5f5-8a3c-d9fe067d98ac}">
+        <p14:section name="1교시 애도를 이해하는 지도" id="{5ec025ed-a1a0-aad2-1658-a36814907ae0}">
           <p14:sldIdLst>
             <p14:sldId id="264"/>
             <p14:sldId id="265"/>
@@ -183,7 +183,7 @@
             <p14:sldId id="273"/>
           </p14:sldIdLst>
         </p14:section>
-        <p14:section name="2교시 말하기 어려운 상실과 안전" id="{42ffaf5f-b309-71fe-e458-1f6b8bfcd7ad}">
+        <p14:section name="2교시 말하기 어려운 상실과 안전" id="{28a777b1-8d7b-d8b5-0c1f-c54e9479b7a5}">
           <p14:sldIdLst>
             <p14:sldId id="274"/>
             <p14:sldId id="275"/>
@@ -198,7 +198,7 @@
             <p14:sldId id="284"/>
           </p14:sldIdLst>
         </p14:section>
-        <p14:section name="3교시 애도와 관계회복 워크숍" id="{1bbfa564-f590-9497-af49-6bdf31ae9d2f}">
+        <p14:section name="3교시 애도와 관계회복 워크숍" id="{47e742a5-e9f2-e6c9-6be8-ba9ee839576d}">
           <p14:sldIdLst>
             <p14:sldId id="285"/>
             <p14:sldId id="286"/>
@@ -218,7 +218,7 @@
             <p14:sldId id="300"/>
           </p14:sldIdLst>
         </p14:section>
-        <p14:section name="정리와 예고" id="{b9ad7755-52bc-fce2-d29f-e52480efe07c}">
+        <p14:section name="정리와 예고" id="{73c6ec18-ecc9-e5e1-eaf6-44111fc6b96b}">
           <p14:sldIdLst>
             <p14:sldId id="301"/>
             <p14:sldId id="302"/>
@@ -6290,7 +6290,7 @@
         <p:spPr>
           <a:xfrm>
             <a:off x="548640" y="2560320"/>
-            <a:ext cx="9144000" cy="1097280"/>
+            <a:ext cx="10607040" cy="1097280"/>
           </a:xfrm>
           <a:prstGeom prst="rect">
             <a:avLst/>
@@ -50930,47 +50930,47 @@
 </file>
 
 <file path=ppt/theme/theme1.xml><?xml version="1.0" encoding="utf-8"?>
-<a:theme xmlns:a="http://schemas.openxmlformats.org/drawingml/2006/main" name="WLC Teal">
+<a:theme xmlns:a="http://schemas.openxmlformats.org/drawingml/2006/main" name="Office Theme">
   <a:themeElements>
-    <a:clrScheme name="WLC Teal">
+    <a:clrScheme name="Office">
       <a:dk1>
-        <a:srgbClr val="222222"/>
+        <a:sysClr val="windowText" lastClr="000000"/>
       </a:dk1>
       <a:lt1>
-        <a:srgbClr val="FFFFFF"/>
+        <a:sysClr val="window" lastClr="FFFFFF"/>
       </a:lt1>
       <a:dk2>
-        <a:srgbClr val="1F4E4A"/>
+        <a:srgbClr val="44546A"/>
       </a:dk2>
       <a:lt2>
-        <a:srgbClr val="EAF3F0"/>
+        <a:srgbClr val="E7E6E6"/>
       </a:lt2>
       <a:accent1>
-        <a:srgbClr val="2E7D6B"/>
+        <a:srgbClr val="4472C4"/>
       </a:accent1>
       <a:accent2>
-        <a:srgbClr val="D98E04"/>
+        <a:srgbClr val="ED7D31"/>
       </a:accent2>
       <a:accent3>
-        <a:srgbClr val="3A6EA5"/>
+        <a:srgbClr val="A5A5A5"/>
       </a:accent3>
       <a:accent4>
-        <a:srgbClr val="B5452F"/>
+        <a:srgbClr val="FFC000"/>
       </a:accent4>
       <a:accent5>
-        <a:srgbClr val="8FB9A8"/>
+        <a:srgbClr val="5B9BD5"/>
       </a:accent5>
       <a:accent6>
-        <a:srgbClr val="6B6B6B"/>
+        <a:srgbClr val="70AD47"/>
       </a:accent6>
       <a:hlink>
-        <a:srgbClr val="3A6EA5"/>
+        <a:srgbClr val="0563C1"/>
       </a:hlink>
       <a:folHlink>
-        <a:srgbClr val="1F4E4A"/>
+        <a:srgbClr val="954F72"/>
       </a:folHlink>
     </a:clrScheme>
-    <a:fontScheme name="WLC Teal">
+    <a:fontScheme name="Office">
       <a:majorFont>
         <a:latin typeface="Noto Serif KR Black"/>
         <a:ea typeface=""/>

--- a/ppt/out/WLC2급_제11강_상실·애도와관계회복코칭.pptx
+++ b/ppt/out/WLC2급_제11강_상실·애도와관계회복코칭.pptx
@@ -157,7 +157,7 @@
   <p:extLst>
     <p:ext uri="{521415D9-36F7-43E2-AB2F-B90AF26B5E84}">
       <p14:sectionLst xmlns:p14="http://schemas.microsoft.com/office/powerpoint/2010/main">
-        <p14:section name="열기" id="{056902d6-9b36-044e-7a65-7d3c64e7f243}">
+        <p14:section name="열기" id="{1f029cd1-5e17-843b-e084-f07d8957190b}">
           <p14:sldIdLst>
             <p14:sldId id="256"/>
             <p14:sldId id="257"/>
@@ -169,7 +169,7 @@
             <p14:sldId id="263"/>
           </p14:sldIdLst>
         </p14:section>
-        <p14:section name="1교시 애도를 이해하는 지도" id="{5ec025ed-a1a0-aad2-1658-a36814907ae0}">
+        <p14:section name="1교시 애도를 이해하는 지도" id="{30d70f6a-e480-5d92-0448-8b0c783f0e07}">
           <p14:sldIdLst>
             <p14:sldId id="264"/>
             <p14:sldId id="265"/>
@@ -183,7 +183,7 @@
             <p14:sldId id="273"/>
           </p14:sldIdLst>
         </p14:section>
-        <p14:section name="2교시 말하기 어려운 상실과 안전" id="{28a777b1-8d7b-d8b5-0c1f-c54e9479b7a5}">
+        <p14:section name="2교시 말하기 어려운 상실과 안전" id="{acbfb65f-5e1c-392b-2ed4-f6b5b93ac87e}">
           <p14:sldIdLst>
             <p14:sldId id="274"/>
             <p14:sldId id="275"/>
@@ -198,7 +198,7 @@
             <p14:sldId id="284"/>
           </p14:sldIdLst>
         </p14:section>
-        <p14:section name="3교시 애도와 관계회복 워크숍" id="{47e742a5-e9f2-e6c9-6be8-ba9ee839576d}">
+        <p14:section name="3교시 애도와 관계회복 워크숍" id="{d60aed6d-478c-1c3a-1dbf-d9b0ed49c58c}">
           <p14:sldIdLst>
             <p14:sldId id="285"/>
             <p14:sldId id="286"/>
@@ -218,7 +218,7 @@
             <p14:sldId id="300"/>
           </p14:sldIdLst>
         </p14:section>
-        <p14:section name="정리와 예고" id="{73c6ec18-ecc9-e5e1-eaf6-44111fc6b96b}">
+        <p14:section name="정리와 예고" id="{a4e9ca90-63c3-8c54-080f-864025d817d2}">
           <p14:sldIdLst>
             <p14:sldId id="301"/>
             <p14:sldId id="302"/>
@@ -50930,47 +50930,47 @@
 </file>
 
 <file path=ppt/theme/theme1.xml><?xml version="1.0" encoding="utf-8"?>
-<a:theme xmlns:a="http://schemas.openxmlformats.org/drawingml/2006/main" name="Office Theme">
+<a:theme xmlns:a="http://schemas.openxmlformats.org/drawingml/2006/main" name="WLC Teal">
   <a:themeElements>
-    <a:clrScheme name="Office">
+    <a:clrScheme name="WLC Teal">
       <a:dk1>
-        <a:sysClr val="windowText" lastClr="000000"/>
+        <a:srgbClr val="222222"/>
       </a:dk1>
       <a:lt1>
-        <a:sysClr val="window" lastClr="FFFFFF"/>
+        <a:srgbClr val="FFFFFF"/>
       </a:lt1>
       <a:dk2>
-        <a:srgbClr val="44546A"/>
+        <a:srgbClr val="1F4E4A"/>
       </a:dk2>
       <a:lt2>
-        <a:srgbClr val="E7E6E6"/>
+        <a:srgbClr val="EAF3F0"/>
       </a:lt2>
       <a:accent1>
-        <a:srgbClr val="4472C4"/>
+        <a:srgbClr val="2E7D6B"/>
       </a:accent1>
       <a:accent2>
-        <a:srgbClr val="ED7D31"/>
+        <a:srgbClr val="D98E04"/>
       </a:accent2>
       <a:accent3>
-        <a:srgbClr val="A5A5A5"/>
+        <a:srgbClr val="3A6EA5"/>
       </a:accent3>
       <a:accent4>
-        <a:srgbClr val="FFC000"/>
+        <a:srgbClr val="B5452F"/>
       </a:accent4>
       <a:accent5>
-        <a:srgbClr val="5B9BD5"/>
+        <a:srgbClr val="8FB9A8"/>
       </a:accent5>
       <a:accent6>
-        <a:srgbClr val="70AD47"/>
+        <a:srgbClr val="6B6B6B"/>
       </a:accent6>
       <a:hlink>
-        <a:srgbClr val="0563C1"/>
+        <a:srgbClr val="3A6EA5"/>
       </a:hlink>
       <a:folHlink>
-        <a:srgbClr val="954F72"/>
+        <a:srgbClr val="1F4E4A"/>
       </a:folHlink>
     </a:clrScheme>
-    <a:fontScheme name="Office">
+    <a:fontScheme name="WLC Teal">
       <a:majorFont>
         <a:latin typeface="Noto Serif KR Black"/>
         <a:ea typeface=""/>
